--- a/Documents/OrangeHRM_JMeter_Pilot_Project.pptx
+++ b/Documents/OrangeHRM_JMeter_Pilot_Project.pptx
@@ -14097,14 +14097,14 @@
           <p:nvPr>
             <p:extLst>
               <p:ext uri="{D42A27DB-BD31-4B8C-83A1-F6EECF244321}">
-                <p14:modId xmlns:p14="http://schemas.microsoft.com/office/powerpoint/2010/main" val="1579011935"/>
+                <p14:modId xmlns:p14="http://schemas.microsoft.com/office/powerpoint/2010/main" val="3267419291"/>
               </p:ext>
             </p:extLst>
           </p:nvPr>
         </p:nvGraphicFramePr>
         <p:xfrm>
           <a:off x="548640" y="2148840"/>
-          <a:ext cx="11064240" cy="914400"/>
+          <a:ext cx="11049311" cy="2651760"/>
         </p:xfrm>
         <a:graphic>
           <a:graphicData uri="http://schemas.openxmlformats.org/drawingml/2006/table">
@@ -14139,7 +14139,7 @@
                     </a:ext>
                   </a:extLst>
                 </a:gridCol>
-                <a:gridCol w="3200400">
+                <a:gridCol w="2271071">
                   <a:extLst>
                     <a:ext uri="{9D8B030D-6E8A-4147-A177-3AD203B41FA5}">
                       <a16:colId xmlns:a16="http://schemas.microsoft.com/office/drawing/2014/main" val="20004"/>
